--- a/evidence/2026-10-02/run-fair/raw/libreoffice/template-mutation/warmup-1.pptx
+++ b/evidence/2026-10-02/run-fair/raw/libreoffice/template-mutation/warmup-1.pptx
@@ -424,7 +424,7 @@
             <a:pPr indent="0" algn="r">
               <a:buNone/>
             </a:pPr>
-            <a:fld id="{D6B688A5-C6AB-4C6F-8CA0-4C79453BCC44}" type="slidenum">
+            <a:fld id="{632AF925-C09B-4271-92F5-2133A4D3D832}" type="slidenum">
               <a:rPr lang="en-US" sz="1400" b="0" u="none" strike="noStrike">
                 <a:solidFill>
                   <a:srgbClr val="000000"/>
@@ -598,7 +598,7 @@
               </a:lnSpc>
               <a:buNone/>
             </a:pPr>
-            <a:fld id="{DEE236A8-9446-46DC-B54E-737A335E52CA}" type="slidenum">
+            <a:fld id="{569A6B3C-B734-4053-853A-24E4C9186CE8}" type="slidenum">
               <a:rPr lang="en-US" sz="1200" b="0" u="none" strike="noStrike">
                 <a:solidFill>
                   <a:srgbClr val="000000"/>
@@ -915,7 +915,7 @@
               </a:lnSpc>
               <a:buNone/>
             </a:pPr>
-            <a:fld id="{8BFC2D21-0A82-4EB1-82D1-602B8738E828}" type="slidenum">
+            <a:fld id="{9840AF77-2969-46F6-AC23-68AC37C6DCCF}" type="slidenum">
               <a:rPr lang="en-US" sz="1200" b="0" u="none" strike="noStrike">
                 <a:solidFill>
                   <a:schemeClr val="dk1">
@@ -1627,7 +1627,7 @@
               </a:lnSpc>
               <a:buNone/>
             </a:pPr>
-            <a:fld id="{BB0A0EB5-F5D2-4029-964F-C179ABBEB3C5}" type="slidenum">
+            <a:fld id="{9CE5503F-D3B2-4587-8352-D45E416AC1AF}" type="slidenum">
               <a:rPr lang="en-US" sz="1200" b="0" u="none" strike="noStrike">
                 <a:solidFill>
                   <a:schemeClr val="dk1">
@@ -2086,7 +2086,7 @@
               </a:lnSpc>
               <a:buNone/>
             </a:pPr>
-            <a:fld id="{5AFF6BE5-C2FF-481B-A7F8-7914F86C10A0}" type="slidenum">
+            <a:fld id="{CC60498A-BEDB-4851-8BDD-84F52BB82DA6}" type="slidenum">
               <a:rPr lang="en-US" sz="1200" b="0" u="none" strike="noStrike">
                 <a:solidFill>
                   <a:schemeClr val="dk1">
@@ -2714,7 +2714,7 @@
               </a:lnSpc>
               <a:buNone/>
             </a:pPr>
-            <a:fld id="{133CD346-DADE-4D15-8A10-6B8AEAA1DC9C}" type="slidenum">
+            <a:fld id="{F1A8B7F8-7669-4E00-A2E3-08D0820F2BE1}" type="slidenum">
               <a:rPr lang="en-US" sz="1200" b="0" u="none" strike="noStrike">
                 <a:solidFill>
                   <a:schemeClr val="dk1">
@@ -3342,7 +3342,7 @@
               </a:lnSpc>
               <a:buNone/>
             </a:pPr>
-            <a:fld id="{CEAA1AA2-CD81-42CA-81F7-14070C4590D4}" type="slidenum">
+            <a:fld id="{2424F037-ED86-456E-8EFD-774B8C97B097}" type="slidenum">
               <a:rPr lang="en-US" sz="1200" b="0" u="none" strike="noStrike">
                 <a:solidFill>
                   <a:schemeClr val="dk1">
@@ -3970,7 +3970,7 @@
               </a:lnSpc>
               <a:buNone/>
             </a:pPr>
-            <a:fld id="{7237D284-0F77-4AF0-852C-111D252CD609}" type="slidenum">
+            <a:fld id="{766FA4D2-E2C6-4AD0-855C-422712B37DE5}" type="slidenum">
               <a:rPr lang="en-US" sz="1200" b="0" u="none" strike="noStrike">
                 <a:solidFill>
                   <a:schemeClr val="dk1">
@@ -4382,7 +4382,7 @@
               </a:lnSpc>
               <a:buNone/>
             </a:pPr>
-            <a:fld id="{4E1C8742-278D-4D05-9D4F-E61D8AA6FB7D}" type="slidenum">
+            <a:fld id="{3FA39930-2DDD-4C68-ABF8-8F4120F71357}" type="slidenum">
               <a:rPr lang="en-US" sz="1200" b="0" u="none" strike="noStrike">
                 <a:solidFill>
                   <a:schemeClr val="dk1">
@@ -5316,7 +5316,7 @@
               </a:lnSpc>
               <a:buNone/>
             </a:pPr>
-            <a:fld id="{B2835BE6-836F-4F6F-8FBC-E4708D517FE6}" type="slidenum">
+            <a:fld id="{B275BF87-64D7-48C2-A7B4-CAE046B041C3}" type="slidenum">
               <a:rPr lang="en-US" sz="1200" b="0" u="none" strike="noStrike">
                 <a:solidFill>
                   <a:schemeClr val="dk1">
@@ -6478,7 +6478,7 @@
               </a:lnSpc>
               <a:buNone/>
             </a:pPr>
-            <a:fld id="{9CC09389-6EB9-44C9-90E3-B37CA6EDE5FB}" type="slidenum">
+            <a:fld id="{F996D4B2-F93C-4C46-BA58-F81D69184797}" type="slidenum">
               <a:rPr lang="en-US" sz="1200" b="0" u="none" strike="noStrike">
                 <a:solidFill>
                   <a:schemeClr val="dk1">
@@ -6800,7 +6800,7 @@
               </a:lnSpc>
               <a:buNone/>
             </a:pPr>
-            <a:fld id="{A63A3123-F8F5-4B22-A538-87FBEE82185B}" type="slidenum">
+            <a:fld id="{F3A040E5-B5CF-4B63-B645-5C19AEE31CFD}" type="slidenum">
               <a:rPr lang="en-US" sz="1200" b="0" u="none" strike="noStrike">
                 <a:solidFill>
                   <a:schemeClr val="dk1">
@@ -7050,7 +7050,7 @@
               </a:lnSpc>
               <a:buNone/>
             </a:pPr>
-            <a:fld id="{E1EDF715-ACAB-460C-93F8-0A197142B5B9}" type="slidenum">
+            <a:fld id="{AE200B08-3B80-4C98-B006-DE10E915F177}" type="slidenum">
               <a:rPr lang="en-US" sz="1200" b="0" u="none" strike="noStrike">
                 <a:solidFill>
                   <a:schemeClr val="dk1">
